--- a/ws02/class/3일차_2.pptx
+++ b/ws02/class/3일차_2.pptx
@@ -7911,7 +7911,7 @@
                 <a:ea typeface="Calibri Light" pitchFamily="34" charset="-122"/>
                 <a:cs typeface="Calibri Light" pitchFamily="34" charset="-120"/>
               </a:rPr>
-              <a:t> — </a:t>
+              <a:t/>
             </a:r>
             <a:r>
               <a:rPr lang="en-US" sz="4200" b="1" dirty="0" err="1">
@@ -8544,7 +8544,7 @@
                 <a:ea typeface="Calibri Light" pitchFamily="34" charset="-122"/>
                 <a:cs typeface="Calibri Light" pitchFamily="34" charset="-120"/>
               </a:rPr>
-              <a:t>— </a:t>
+              <a:t/>
             </a:r>
             <a:r>
               <a:rPr lang="en-US" sz="4200" b="1" dirty="0" err="1">
@@ -8885,7 +8885,7 @@
                 <a:ea typeface="Calibri" pitchFamily="34" charset="-122"/>
                 <a:cs typeface="Calibri" pitchFamily="34" charset="-120"/>
               </a:rPr>
-              <a:t>— 정기 보안검사로 탐지 불가</a:t>
+              <a:t>정기 보안검사로 탐지 불가</a:t>
             </a:r>
             <a:endParaRPr lang="en-US" sz="2400" dirty="0">
               <a:solidFill>
@@ -10798,7 +10798,7 @@
                 <a:ea typeface="Calibri" pitchFamily="34" charset="-122"/>
                 <a:cs typeface="Calibri" pitchFamily="34" charset="-120"/>
               </a:rPr>
-              <a:t>'구현 레이어 이슈' — 위협 분류가 아니라 개발자의 코딩 실수. AI가 취약한 코드를 </a:t>
+              <a:t>'구현 레이어 이슈' — 위협 분류가 아니라 개발자의 코딩 실수. AI가 취약한 코드를</a:t>
             </a:r>
             <a:r>
               <a:rPr lang="en-US" sz="2600" dirty="0" err="1">
@@ -11128,7 +11128,7 @@
                 <a:ea typeface="Calibri Light" pitchFamily="34" charset="-122"/>
                 <a:cs typeface="Calibri Light" pitchFamily="34" charset="-120"/>
               </a:rPr>
-              <a:t> — Agent가 해서는 안 </a:t>
+              <a:t>Agent가 해서는 안 </a:t>
             </a:r>
             <a:r>
               <a:rPr lang="en-US" sz="4200" b="1" dirty="0" err="1">
@@ -20485,7 +20485,7 @@
                 <a:ea typeface="Calibri" pitchFamily="34" charset="-122"/>
                 <a:cs typeface="Calibri" pitchFamily="34" charset="-120"/>
               </a:rPr>
-              <a:t> 체계가 만들어진 관점(위협 분류) 바깥에 있다</a:t>
+              <a:t>체계가 만들어진 관점(위협 분류) 바깥에 있다</a:t>
             </a:r>
             <a:endParaRPr lang="en-US" sz="2600" dirty="0"/>
           </a:p>
@@ -27598,7 +27598,7 @@
                 <a:ea typeface="Arial" pitchFamily="34" charset="-122"/>
                 <a:cs typeface="Arial" pitchFamily="34" charset="-120"/>
               </a:rPr>
-              <a:t> — 민간 데이터가 전장의 무기가 되다</a:t>
+              <a:t>민간 데이터가 전장의 무기가 되다</a:t>
             </a:r>
             <a:endParaRPr lang="en-US" sz="5600" dirty="0"/>
           </a:p>
@@ -32632,7 +32632,7 @@
                 <a:ea typeface="Arial" pitchFamily="34" charset="-122"/>
                 <a:cs typeface="Arial" pitchFamily="34" charset="-120"/>
               </a:rPr>
-              <a:t> — 이것이 프롬프트 인젝션(T08)과 RAG 오염(LLM01)이 위험한 이유</a:t>
+              <a:t>이것이 프롬프트 인젝션(T08)과 RAG 오염(LLM01)이 위험한 이유</a:t>
             </a:r>
             <a:endParaRPr lang="en-US" sz="2000" dirty="0"/>
           </a:p>
@@ -33342,7 +33342,7 @@
                 <a:ea typeface="Calibri" pitchFamily="34" charset="-122"/>
                 <a:cs typeface="Calibri" pitchFamily="34" charset="-120"/>
               </a:rPr>
-              <a:t>— CPU가 물리적으로 구분 처리</a:t>
+              <a:t>CPU가 물리적으로 구분 처리</a:t>
             </a:r>
             <a:endParaRPr lang="en-US" sz="2000" dirty="0"/>
           </a:p>
@@ -33891,7 +33891,7 @@
                 <a:ea typeface="Calibri" pitchFamily="34" charset="-122"/>
                 <a:cs typeface="Calibri" pitchFamily="34" charset="-120"/>
               </a:rPr>
-              <a:t>— 구조적으로 구분 불가</a:t>
+              <a:t>구조적으로 구분 불가</a:t>
             </a:r>
             <a:endParaRPr lang="en-US" sz="2000" dirty="0">
               <a:solidFill>
@@ -34122,7 +34122,7 @@
                 <a:ea typeface="Calibri" pitchFamily="34" charset="-122"/>
                 <a:cs typeface="Calibri" pitchFamily="34" charset="-120"/>
               </a:rPr>
-              <a:t>— 해결책은 아키텍처 수준의 분리(privileged channel), 현재 연구 진행 중</a:t>
+              <a:t>해결책은 아키텍처 수준의 분리(privileged channel), 현재 연구 진행 중</a:t>
             </a:r>
             <a:endParaRPr lang="en-US" sz="2000" dirty="0"/>
           </a:p>
